--- a/curso/pptx/S67.pptx
+++ b/curso/pptx/S67.pptx
@@ -7156,7 +7156,7 @@
                 </a:solidFill>
                 <a:latin typeface="Nunito Sans"/>
               </a:rPr>
-              <a:t>Producir:</a:t>
+              <a:t>生产：</a:t>
             </a:r>
             <a:r>
               <a:rPr sz="2800" b="0">
@@ -7165,7 +7165,7 @@
                 </a:solidFill>
                 <a:latin typeface="Nunito Sans"/>
               </a:rPr>
-              <a:t> comida, ropa, el móvil, la luz, la gasolina</a:t>
+              <a:t>食物、衣服、手机、电、汽油</a:t>
             </a:r>
           </a:p>
           <a:p>
@@ -7190,7 +7190,7 @@
                 </a:solidFill>
                 <a:latin typeface="Nunito Sans"/>
               </a:rPr>
-              <a:t>Absorber:</a:t>
+              <a:t>吸收：</a:t>
             </a:r>
             <a:r>
               <a:rPr sz="2800" b="0">
@@ -7199,7 +7199,7 @@
                 </a:solidFill>
                 <a:latin typeface="Nunito Sans"/>
               </a:rPr>
-              <a:t> sobre todo el CO₂ que echamos al aire</a:t>
+              <a:t>主要是我们排放到空气中的CO₂</a:t>
             </a:r>
           </a:p>
           <a:p>
@@ -7224,7 +7224,7 @@
                 </a:solidFill>
                 <a:latin typeface="Nunito Sans"/>
               </a:rPr>
-              <a:t>Se mide en </a:t>
+              <a:t>用</a:t>
             </a:r>
             <a:r>
               <a:rPr sz="2800" b="1">
@@ -7233,7 +7233,16 @@
                 </a:solidFill>
                 <a:latin typeface="Nunito Sans"/>
               </a:rPr>
-              <a:t>hectáreas globales</a:t>
+              <a:t>全球公顷</a:t>
+            </a:r>
+            <a:r>
+              <a:rPr sz="2800" b="0">
+                <a:solidFill>
+                  <a:srgbClr val="1F2A44"/>
+                </a:solidFill>
+                <a:latin typeface="Nunito Sans"/>
+              </a:rPr>
+              <a:t>来衡量</a:t>
             </a:r>
           </a:p>
           <a:p>
@@ -7258,7 +7267,7 @@
                 </a:solidFill>
                 <a:latin typeface="Nunito Sans"/>
               </a:rPr>
-              <a:t>Una hectárea es algo más que un campo de fútbol</a:t>
+              <a:t>一公顷比一个足球场还要大一点</a:t>
             </a:r>
           </a:p>
         </p:txBody>
@@ -7492,7 +7501,7 @@
                 </a:solidFill>
                 <a:latin typeface="Nunito Sans"/>
               </a:rPr>
-              <a:t>Huella </a:t>
+              <a:t>足迹</a:t>
             </a:r>
             <a:r>
               <a:rPr sz="2800" b="1">
@@ -7501,7 +7510,7 @@
                 </a:solidFill>
                 <a:latin typeface="Nunito Sans"/>
               </a:rPr>
-              <a:t>menor</a:t>
+              <a:t>小于</a:t>
             </a:r>
             <a:r>
               <a:rPr sz="2800" b="0">
@@ -7510,7 +7519,7 @@
                 </a:solidFill>
                 <a:latin typeface="Nunito Sans"/>
               </a:rPr>
-              <a:t> que la biocapacidad: vivimos de lo que se repone</a:t>
+              <a:t>生物承载力：我们靠能够恢复的东西生活</a:t>
             </a:r>
           </a:p>
           <a:p>
@@ -7535,7 +7544,7 @@
                 </a:solidFill>
                 <a:latin typeface="Nunito Sans"/>
               </a:rPr>
-              <a:t>Huella </a:t>
+              <a:t>足迹</a:t>
             </a:r>
             <a:r>
               <a:rPr sz="2800" b="1">
@@ -7544,7 +7553,7 @@
                 </a:solidFill>
                 <a:latin typeface="Nunito Sans"/>
               </a:rPr>
-              <a:t>mayor</a:t>
+              <a:t>大于</a:t>
             </a:r>
             <a:r>
               <a:rPr sz="2800" b="0">
@@ -7553,7 +7562,7 @@
                 </a:solidFill>
                 <a:latin typeface="Nunito Sans"/>
               </a:rPr>
-              <a:t> que la biocapacidad: gastamos más de lo que se repone</a:t>
+              <a:t>生物承载力：我们消耗的比能恢复的更多</a:t>
             </a:r>
           </a:p>
           <a:p>
@@ -7578,7 +7587,7 @@
                 </a:solidFill>
                 <a:latin typeface="Nunito Sans"/>
               </a:rPr>
-              <a:t>La huella la propusieron Wackernagel y Rees en los años noventa</a:t>
+              <a:t>足迹这个概念是瓦克纳格尔和里斯在上世纪九十年代提出的</a:t>
             </a:r>
           </a:p>
         </p:txBody>
@@ -8172,7 +8181,7 @@
                 </a:solidFill>
                 <a:latin typeface="Nunito Sans"/>
               </a:rPr>
-              <a:t>En inglés: </a:t>
+              <a:t>英文：</a:t>
             </a:r>
             <a:r>
               <a:rPr sz="2800" b="1">
@@ -8206,7 +8215,7 @@
                 </a:solidFill>
                 <a:latin typeface="Nunito Sans"/>
               </a:rPr>
-              <a:t>Últimos años: finales de </a:t>
+              <a:t>近几年：在</a:t>
             </a:r>
             <a:r>
               <a:rPr sz="2800" b="1">
@@ -8215,7 +8224,7 @@
                 </a:solidFill>
                 <a:latin typeface="Nunito Sans"/>
               </a:rPr>
-              <a:t>julio</a:t>
+              <a:t>七月</a:t>
             </a:r>
             <a:r>
               <a:rPr sz="2800" b="0">
@@ -8224,7 +8233,7 @@
                 </a:solidFill>
                 <a:latin typeface="Nunito Sans"/>
               </a:rPr>
-              <a:t> o principios de agosto</a:t>
+              <a:t>底或八月初</a:t>
             </a:r>
           </a:p>
           <a:p>
@@ -8249,7 +8258,7 @@
                 </a:solidFill>
                 <a:latin typeface="Nunito Sans"/>
               </a:rPr>
-              <a:t>Desde ese día vivimos </a:t>
+              <a:t>从那天起，我们就是在</a:t>
             </a:r>
             <a:r>
               <a:rPr sz="2800" b="1">
@@ -8258,7 +8267,7 @@
                 </a:solidFill>
                 <a:latin typeface="Nunito Sans"/>
               </a:rPr>
-              <a:t>a crédito</a:t>
+              <a:t>透支</a:t>
             </a:r>
             <a:r>
               <a:rPr sz="2800" b="0">
@@ -8267,7 +8276,7 @@
                 </a:solidFill>
                 <a:latin typeface="Nunito Sans"/>
               </a:rPr>
-              <a:t>, como con un préstamo</a:t>
+              <a:t>生活，就像借了贷款一样</a:t>
             </a:r>
           </a:p>
           <a:p>
@@ -8292,7 +8301,7 @@
                 </a:solidFill>
                 <a:latin typeface="Nunito Sans"/>
               </a:rPr>
-              <a:t>España llega a su propio día mucho antes, en primavera</a:t>
+              <a:t>西班牙更早就到了自己的超载日，在春天</a:t>
             </a:r>
           </a:p>
         </p:txBody>

--- a/curso/pptx/S67.pptx
+++ b/curso/pptx/S67.pptx
@@ -4851,7 +4851,7 @@
                 </a:solidFill>
                 <a:latin typeface="Nunito Sans"/>
               </a:rPr>
-              <a:t>奈亚拉读到：“人类用掉1.7个地球。”她想：“这是个准确的数据，就像我书包的重量一样。”</a:t>
+              <a:t>一个女孩读到：“人类用掉1.7个地球。”她想：“这是个准确的数据，就像我书包的重量一样。”</a:t>
             </a:r>
           </a:p>
         </p:txBody>
@@ -5178,7 +5178,7 @@
                 </a:solidFill>
                 <a:latin typeface="Nunito Sans"/>
               </a:rPr>
-              <a:t>奥马尔推理说：“如果我们用掉1.7个地球，可是只有一个，那这个数据就是假的。不可能花掉比现有的更多的东西。”</a:t>
+              <a:t>一个男孩推理说：“如果我们用掉1.7个地球，可是只有一个，那这个数据就是假的。不可能花掉比现有的更多的东西。”</a:t>
             </a:r>
           </a:p>
         </p:txBody>
@@ -5226,7 +5226,7 @@
                 </a:solidFill>
                 <a:latin typeface="Nunito Sans"/>
               </a:rPr>
-              <a:t>奥马尔说得对吗？</a:t>
+              <a:t>这个男孩说得对吗？</a:t>
             </a:r>
           </a:p>
           <a:p>
